--- a/showcase/presentations/04_kompleksny_analiticheskiy.pptx
+++ b/showcase/presentations/04_kompleksny_analiticheskiy.pptx
@@ -3329,7 +3329,7 @@
               </a:defRPr>
             </a:pPr>
             <a:r>
-              <a:t>06.06.2026</a:t>
+              <a:t>07.06.2026</a:t>
             </a:r>
           </a:p>
         </p:txBody>
@@ -4603,7 +4603,7 @@
       </p:sp>
       <p:pic>
         <p:nvPicPr>
-          <p:cNvPr id="5" name="Picture 4" descr="pres_slide_65e4ae0c21_0_г_минск_доминирует_в_общем_объ_ме_начисл.png"/>
+          <p:cNvPr id="5" name="Picture 4" descr="pres_slide_8cc6290cb1_0_г_минск_доминирует_в_общем_объ_ме_начисл.png"/>
           <p:cNvPicPr>
             <a:picLocks noChangeAspect="1"/>
           </p:cNvPicPr>
@@ -5019,7 +5019,7 @@
       </p:sp>
       <p:pic>
         <p:nvPicPr>
-          <p:cNvPr id="5" name="Picture 4" descr="pres_slide_65e4ae0c21_1_пик_начислений_ндс_в_конце_года_в_г_минс.png"/>
+          <p:cNvPr id="5" name="Picture 4" descr="pres_slide_8cc6290cb1_1_пик_начислений_ндс_в_конце_года_в_г_минс.png"/>
           <p:cNvPicPr>
             <a:picLocks noChangeAspect="1"/>
           </p:cNvPicPr>
@@ -5486,7 +5486,7 @@
       </p:sp>
       <p:pic>
         <p:nvPicPr>
-          <p:cNvPr id="5" name="Picture 4" descr="pres_slide_65e4ae0c21_2_высокие_начисления_не_всегда_означают_вы.png"/>
+          <p:cNvPr id="5" name="Picture 4" descr="pres_slide_8cc6290cb1_2_высокие_начисления_не_всегда_означают_вы.png"/>
           <p:cNvPicPr>
             <a:picLocks noChangeAspect="1"/>
           </p:cNvPicPr>
@@ -5953,7 +5953,7 @@
       </p:sp>
       <p:pic>
         <p:nvPicPr>
-          <p:cNvPr id="5" name="Picture 4" descr="pres_slide_65e4ae0c21_3_ндс_и_подоходный_налог_доминируют_в_г_ми.png"/>
+          <p:cNvPr id="5" name="Picture 4" descr="pres_slide_8cc6290cb1_3_ндс_и_подоходный_налог_доминируют_в_г_ми.png"/>
           <p:cNvPicPr>
             <a:picLocks noChangeAspect="1"/>
           </p:cNvPicPr>
